--- a/schools-presentations/A Gymnasiou/A5.2 Μ2 - Διαχείριση Ηλεκτρονικού Ταχυδρομείου.pptx
+++ b/schools-presentations/A Gymnasiou/A5.2 Μ2 - Διαχείριση Ηλεκτρονικού Ταχυδρομείου.pptx
@@ -5,14 +5,13 @@
     <p:sldMasterId id="2147483648" r:id="rId1"/>
   </p:sldMasterIdLst>
   <p:notesMasterIdLst>
-    <p:notesMasterId r:id="rId7"/>
+    <p:notesMasterId r:id="rId6"/>
   </p:notesMasterIdLst>
   <p:sldIdLst>
     <p:sldId id="256" r:id="rId2"/>
     <p:sldId id="257" r:id="rId3"/>
     <p:sldId id="258" r:id="rId4"/>
     <p:sldId id="259" r:id="rId5"/>
-    <p:sldId id="260" r:id="rId6"/>
   </p:sldIdLst>
   <p:sldSz cx="12192000" cy="6858000"/>
   <p:notesSz cx="6858000" cy="9144000"/>
@@ -111,6 +110,11 @@
       </a:defRPr>
     </a:lvl9pPr>
   </p:defaultTextStyle>
+  <p:extLst>
+    <p:ext uri="{EFAFB233-063F-42B5-8137-9DF3F51BA10A}">
+      <p15:sldGuideLst xmlns:p15="http://schemas.microsoft.com/office/powerpoint/2012/main"/>
+    </p:ext>
+  </p:extLst>
 </p:presentation>
 </file>
 
@@ -118,41 +122,17 @@
 <pc:chgInfo xmlns:a="http://schemas.openxmlformats.org/drawingml/2006/main" xmlns:r="http://schemas.openxmlformats.org/officeDocument/2006/relationships" xmlns:ac="http://schemas.microsoft.com/office/drawing/2013/main/command" xmlns:pc="http://schemas.microsoft.com/office/powerpoint/2013/main/command">
   <pc:docChgLst>
     <pc:chgData name="Άριστος Αρέστη" userId="813aa191-2d4c-464f-9d05-0a7e494d859f" providerId="ADAL" clId="{49C7B61D-1ACF-4AFF-A04E-A3B433E32474}"/>
-    <pc:docChg chg="custSel modSld">
-      <pc:chgData name="Άριστος Αρέστη" userId="813aa191-2d4c-464f-9d05-0a7e494d859f" providerId="ADAL" clId="{49C7B61D-1ACF-4AFF-A04E-A3B433E32474}" dt="2026-09-26T06:34:31.024" v="2" actId="478"/>
+    <pc:docChg chg="custSel delSld modSld">
+      <pc:chgData name="Άριστος Αρέστη" userId="813aa191-2d4c-464f-9d05-0a7e494d859f" providerId="ADAL" clId="{49C7B61D-1ACF-4AFF-A04E-A3B433E32474}" dt="2026-10-19T14:13:35.163" v="3" actId="47"/>
       <pc:docMkLst>
         <pc:docMk/>
       </pc:docMkLst>
-      <pc:sldChg chg="delSp mod">
-        <pc:chgData name="Άριστος Αρέστη" userId="813aa191-2d4c-464f-9d05-0a7e494d859f" providerId="ADAL" clId="{49C7B61D-1ACF-4AFF-A04E-A3B433E32474}" dt="2026-09-26T06:34:31.024" v="2" actId="478"/>
+      <pc:sldChg chg="delSp del mod">
+        <pc:chgData name="Άριστος Αρέστη" userId="813aa191-2d4c-464f-9d05-0a7e494d859f" providerId="ADAL" clId="{49C7B61D-1ACF-4AFF-A04E-A3B433E32474}" dt="2026-10-19T14:13:35.163" v="3" actId="47"/>
         <pc:sldMkLst>
           <pc:docMk/>
           <pc:sldMk cId="1200177838" sldId="260"/>
         </pc:sldMkLst>
-        <pc:picChg chg="del">
-          <ac:chgData name="Άριστος Αρέστη" userId="813aa191-2d4c-464f-9d05-0a7e494d859f" providerId="ADAL" clId="{49C7B61D-1ACF-4AFF-A04E-A3B433E32474}" dt="2026-09-26T06:34:29.360" v="0" actId="478"/>
-          <ac:picMkLst>
-            <pc:docMk/>
-            <pc:sldMk cId="1200177838" sldId="260"/>
-            <ac:picMk id="14" creationId="{00000000-0000-0000-0000-000000000000}"/>
-          </ac:picMkLst>
-        </pc:picChg>
-        <pc:picChg chg="del">
-          <ac:chgData name="Άριστος Αρέστη" userId="813aa191-2d4c-464f-9d05-0a7e494d859f" providerId="ADAL" clId="{49C7B61D-1ACF-4AFF-A04E-A3B433E32474}" dt="2026-09-26T06:34:30.319" v="1" actId="478"/>
-          <ac:picMkLst>
-            <pc:docMk/>
-            <pc:sldMk cId="1200177838" sldId="260"/>
-            <ac:picMk id="15" creationId="{00000000-0000-0000-0000-000000000000}"/>
-          </ac:picMkLst>
-        </pc:picChg>
-        <pc:picChg chg="del">
-          <ac:chgData name="Άριστος Αρέστη" userId="813aa191-2d4c-464f-9d05-0a7e494d859f" providerId="ADAL" clId="{49C7B61D-1ACF-4AFF-A04E-A3B433E32474}" dt="2026-09-26T06:34:31.024" v="2" actId="478"/>
-          <ac:picMkLst>
-            <pc:docMk/>
-            <pc:sldMk cId="1200177838" sldId="260"/>
-            <ac:picMk id="16" creationId="{00000000-0000-0000-0000-000000000000}"/>
-          </ac:picMkLst>
-        </pc:picChg>
       </pc:sldChg>
     </pc:docChg>
   </pc:docChgLst>
@@ -562,83 +542,6 @@
 </file>
 
 <file path=ppt/notesSlides/notesSlide4.xml><?xml version="1.0" encoding="utf-8"?>
-<p:notes xmlns:a="http://schemas.openxmlformats.org/drawingml/2006/main" xmlns:r="http://schemas.openxmlformats.org/officeDocument/2006/relationships" xmlns:p="http://schemas.openxmlformats.org/presentationml/2006/main">
-  <p:cSld>
-    <p:spTree>
-      <p:nvGrpSpPr>
-        <p:cNvPr id="1" name=""/>
-        <p:cNvGrpSpPr/>
-        <p:nvPr/>
-      </p:nvGrpSpPr>
-      <p:grpSpPr>
-        <a:xfrm>
-          <a:off x="0" y="0"/>
-          <a:ext cx="0" cy="0"/>
-          <a:chOff x="0" y="0"/>
-          <a:chExt cx="0" cy="0"/>
-        </a:xfrm>
-      </p:grpSpPr>
-      <p:sp>
-        <p:nvSpPr>
-          <p:cNvPr id="2" name="Slide Image Placeholder 1"/>
-          <p:cNvSpPr>
-            <a:spLocks noGrp="1" noRot="1" noChangeAspect="1"/>
-          </p:cNvSpPr>
-          <p:nvPr>
-            <p:ph type="sldImg"/>
-          </p:nvPr>
-        </p:nvSpPr>
-        <p:spPr/>
-      </p:sp>
-      <p:sp>
-        <p:nvSpPr>
-          <p:cNvPr id="3" name="Notes Placeholder 2"/>
-          <p:cNvSpPr>
-            <a:spLocks noGrp="1"/>
-          </p:cNvSpPr>
-          <p:nvPr>
-            <p:ph type="body" idx="1"/>
-          </p:nvPr>
-        </p:nvSpPr>
-        <p:spPr/>
-        <p:txBody>
-          <a:bodyPr/>
-          <a:lstStyle/>
-          <a:p>
-            <a:r>
-              <a:t>Πηγή: Σημειώσεις και Τετράδιο Εργασιών Πληροφορικής Α΄ Γυμνασίου, ενότητα Α.5.2.Μ2.</a:t>
-            </a:r>
-          </a:p>
-        </p:txBody>
-      </p:sp>
-      <p:sp>
-        <p:nvSpPr>
-          <p:cNvPr id="4" name="Slide Number Placeholder 3"/>
-          <p:cNvSpPr>
-            <a:spLocks noGrp="1"/>
-          </p:cNvSpPr>
-          <p:nvPr>
-            <p:ph type="sldNum" idx="5"/>
-          </p:nvPr>
-        </p:nvSpPr>
-        <p:spPr/>
-        <p:txBody>
-          <a:bodyPr/>
-          <a:lstStyle/>
-          <a:p>
-            <a:endParaRPr/>
-          </a:p>
-        </p:txBody>
-      </p:sp>
-    </p:spTree>
-  </p:cSld>
-  <p:clrMapOvr>
-    <a:masterClrMapping/>
-  </p:clrMapOvr>
-</p:notes>
-</file>
-
-<file path=ppt/notesSlides/notesSlide5.xml><?xml version="1.0" encoding="utf-8"?>
 <p:notes xmlns:a="http://schemas.openxmlformats.org/drawingml/2006/main" xmlns:r="http://schemas.openxmlformats.org/officeDocument/2006/relationships" xmlns:p="http://schemas.openxmlformats.org/presentationml/2006/main">
   <p:cSld>
     <p:spTree>
@@ -3446,357 +3349,6 @@
     <p:extLst>
       <p:ext uri="{BB962C8B-B14F-4D97-AF65-F5344CB8AC3E}">
         <p14:creationId xmlns:p14="http://schemas.microsoft.com/office/powerpoint/2010/main" val="1630400849"/>
-      </p:ext>
-    </p:extLst>
-  </p:cSld>
-  <p:clrMapOvr>
-    <a:masterClrMapping/>
-  </p:clrMapOvr>
-</p:sld>
-</file>
-
-<file path=ppt/slides/slide5.xml><?xml version="1.0" encoding="utf-8"?>
-<p:sld xmlns:a="http://schemas.openxmlformats.org/drawingml/2006/main" xmlns:r="http://schemas.openxmlformats.org/officeDocument/2006/relationships" xmlns:p="http://schemas.openxmlformats.org/presentationml/2006/main">
-  <p:cSld>
-    <p:bg>
-      <p:bgPr>
-        <a:solidFill>
-          <a:srgbClr val="FFFFFF"/>
-        </a:solidFill>
-        <a:effectLst/>
-      </p:bgPr>
-    </p:bg>
-    <p:spTree>
-      <p:nvGrpSpPr>
-        <p:cNvPr id="1" name=""/>
-        <p:cNvGrpSpPr/>
-        <p:nvPr/>
-      </p:nvGrpSpPr>
-      <p:grpSpPr>
-        <a:xfrm>
-          <a:off x="0" y="0"/>
-          <a:ext cx="0" cy="0"/>
-          <a:chOff x="0" y="0"/>
-          <a:chExt cx="0" cy="0"/>
-        </a:xfrm>
-      </p:grpSpPr>
-      <p:sp>
-        <p:nvSpPr>
-          <p:cNvPr id="10" name="Rectangle 9">
-            <a:extLst>
-              <a:ext uri="{FF2B5EF4-FFF2-40B4-BE49-F238E27FC236}">
-                <a16:creationId xmlns:a16="http://schemas.microsoft.com/office/drawing/2014/main" id="{71895EB8-36F6-489C-822F-F071C6E71FE1}"/>
-              </a:ext>
-            </a:extLst>
-          </p:cNvPr>
-          <p:cNvSpPr>
-            <a:spLocks noGrp="1"/>
-          </p:cNvSpPr>
-          <p:nvPr/>
-        </p:nvSpPr>
-        <p:spPr>
-          <a:xfrm>
-            <a:off x="552450" y="333375"/>
-            <a:ext cx="11087100" cy="704850"/>
-          </a:xfrm>
-          <a:prstGeom prst="rect">
-            <a:avLst/>
-          </a:prstGeom>
-          <a:noFill/>
-          <a:ln w="0">
-            <a:noFill/>
-          </a:ln>
-        </p:spPr>
-        <p:txBody>
-          <a:bodyPr lIns="38100" tIns="19050" rIns="38100" bIns="19050" anchor="t">
-            <a:normAutofit/>
-          </a:bodyPr>
-          <a:lstStyle/>
-          <a:p>
-            <a:pPr algn="l">
-              <a:defRPr sz="2550" b="0">
-                <a:solidFill>
-                  <a:srgbClr val="111111"/>
-                </a:solidFill>
-                <a:latin typeface="Tahoma"/>
-                <a:ea typeface="Tahoma"/>
-                <a:cs typeface="Tahoma"/>
-              </a:defRPr>
-            </a:pPr>
-            <a:r>
-              <a:rPr sz="2550" b="0">
-                <a:solidFill>
-                  <a:srgbClr val="111111"/>
-                </a:solidFill>
-                <a:latin typeface="Tahoma"/>
-                <a:ea typeface="Tahoma"/>
-                <a:cs typeface="Tahoma"/>
-              </a:rPr>
-              <a:t>Ασκήσεις Α5.2 Μ2</a:t>
-            </a:r>
-          </a:p>
-        </p:txBody>
-      </p:sp>
-      <p:sp>
-        <p:nvSpPr>
-          <p:cNvPr id="2" name="Rectangle 1">
-            <a:extLst>
-              <a:ext uri="{FF2B5EF4-FFF2-40B4-BE49-F238E27FC236}">
-                <a16:creationId xmlns:a16="http://schemas.microsoft.com/office/drawing/2014/main" id="{362F47D3-A0DD-43CA-A643-1CB10BD67617}"/>
-              </a:ext>
-            </a:extLst>
-          </p:cNvPr>
-          <p:cNvSpPr>
-            <a:spLocks noGrp="1"/>
-          </p:cNvSpPr>
-          <p:nvPr/>
-        </p:nvSpPr>
-        <p:spPr>
-          <a:xfrm>
-            <a:off x="619125" y="1200150"/>
-            <a:ext cx="1762125" cy="47625"/>
-          </a:xfrm>
-          <a:prstGeom prst="rect">
-            <a:avLst/>
-          </a:prstGeom>
-          <a:solidFill>
-            <a:srgbClr val="F57C24"/>
-          </a:solidFill>
-          <a:ln w="0">
-            <a:noFill/>
-          </a:ln>
-        </p:spPr>
-        <p:txBody>
-          <a:bodyPr/>
-          <a:lstStyle/>
-          <a:p>
-            <a:endParaRPr lang="en-GB"/>
-          </a:p>
-        </p:txBody>
-      </p:sp>
-      <p:sp>
-        <p:nvSpPr>
-          <p:cNvPr id="3" name="Rectangle 2">
-            <a:extLst>
-              <a:ext uri="{FF2B5EF4-FFF2-40B4-BE49-F238E27FC236}">
-                <a16:creationId xmlns:a16="http://schemas.microsoft.com/office/drawing/2014/main" id="{E168D9C3-AEF9-4F75-BE80-7B656EAB6BA9}"/>
-              </a:ext>
-            </a:extLst>
-          </p:cNvPr>
-          <p:cNvSpPr>
-            <a:spLocks noGrp="1"/>
-          </p:cNvSpPr>
-          <p:nvPr/>
-        </p:nvSpPr>
-        <p:spPr>
-          <a:xfrm>
-            <a:off x="590550" y="1524000"/>
-            <a:ext cx="4000500" cy="1285875"/>
-          </a:xfrm>
-          <a:prstGeom prst="rect">
-            <a:avLst/>
-          </a:prstGeom>
-          <a:noFill/>
-          <a:ln w="0">
-            <a:noFill/>
-          </a:ln>
-        </p:spPr>
-        <p:txBody>
-          <a:bodyPr lIns="28575" tIns="19050" rIns="28575" bIns="19050" anchor="t">
-            <a:normAutofit/>
-          </a:bodyPr>
-          <a:lstStyle/>
-          <a:p>
-            <a:pPr marL="254000" indent="-152400" algn="l">
-              <a:spcAft>
-                <a:spcPts val="520"/>
-              </a:spcAft>
-              <a:buChar char="•"/>
-              <a:defRPr sz="1800" b="0">
-                <a:solidFill>
-                  <a:srgbClr val="111111"/>
-                </a:solidFill>
-                <a:latin typeface="Tahoma"/>
-                <a:ea typeface="Tahoma"/>
-                <a:cs typeface="Tahoma"/>
-              </a:defRPr>
-            </a:pPr>
-            <a:r>
-              <a:rPr sz="1800" b="0">
-                <a:solidFill>
-                  <a:srgbClr val="111111"/>
-                </a:solidFill>
-                <a:latin typeface="Tahoma"/>
-                <a:ea typeface="Tahoma"/>
-                <a:cs typeface="Tahoma"/>
-              </a:rPr>
-              <a:t>Σελίδες 135–137</a:t>
-            </a:r>
-          </a:p>
-          <a:p>
-            <a:pPr marL="254000" indent="-152400" algn="l">
-              <a:spcAft>
-                <a:spcPts val="520"/>
-              </a:spcAft>
-              <a:buChar char="•"/>
-              <a:defRPr sz="1800" b="0">
-                <a:solidFill>
-                  <a:srgbClr val="111111"/>
-                </a:solidFill>
-                <a:latin typeface="Tahoma"/>
-                <a:ea typeface="Tahoma"/>
-                <a:cs typeface="Tahoma"/>
-              </a:defRPr>
-            </a:pPr>
-            <a:r>
-              <a:rPr sz="1800" b="0">
-                <a:solidFill>
-                  <a:srgbClr val="111111"/>
-                </a:solidFill>
-                <a:latin typeface="Tahoma"/>
-                <a:ea typeface="Tahoma"/>
-                <a:cs typeface="Tahoma"/>
-              </a:rPr>
-              <a:t>Δραστηριότητες 1–19</a:t>
-            </a:r>
-          </a:p>
-        </p:txBody>
-      </p:sp>
-      <p:sp>
-        <p:nvSpPr>
-          <p:cNvPr id="4" name="Rectangle 3">
-            <a:extLst>
-              <a:ext uri="{FF2B5EF4-FFF2-40B4-BE49-F238E27FC236}">
-                <a16:creationId xmlns:a16="http://schemas.microsoft.com/office/drawing/2014/main" id="{F2E93EF1-B98A-4856-93F8-2E0AD107F9F7}"/>
-              </a:ext>
-            </a:extLst>
-          </p:cNvPr>
-          <p:cNvSpPr>
-            <a:spLocks noGrp="1"/>
-          </p:cNvSpPr>
-          <p:nvPr/>
-        </p:nvSpPr>
-        <p:spPr>
-          <a:xfrm>
-            <a:off x="590550" y="3143250"/>
-            <a:ext cx="4000500" cy="1238250"/>
-          </a:xfrm>
-          <a:prstGeom prst="rect">
-            <a:avLst/>
-          </a:prstGeom>
-          <a:noFill/>
-          <a:ln w="0">
-            <a:noFill/>
-          </a:ln>
-        </p:spPr>
-        <p:txBody>
-          <a:bodyPr lIns="38100" tIns="19050" rIns="38100" bIns="19050" anchor="t">
-            <a:normAutofit/>
-          </a:bodyPr>
-          <a:lstStyle/>
-          <a:p>
-            <a:pPr algn="l">
-              <a:defRPr sz="1575" b="0">
-                <a:solidFill>
-                  <a:srgbClr val="444444"/>
-                </a:solidFill>
-                <a:latin typeface="Tahoma"/>
-                <a:ea typeface="Tahoma"/>
-                <a:cs typeface="Tahoma"/>
-              </a:defRPr>
-            </a:pPr>
-            <a:r>
-              <a:rPr sz="1575" b="0">
-                <a:solidFill>
-                  <a:srgbClr val="444444"/>
-                </a:solidFill>
-                <a:latin typeface="Tahoma"/>
-                <a:ea typeface="Tahoma"/>
-                <a:cs typeface="Tahoma"/>
-              </a:rPr>
-              <a:t>Εφαρμογή: Forward, Cc και Bcc. Παρατηρήστε ποιοι παραλήπτες βλέπουν τις άλλες διευθύνσεις.</a:t>
-            </a:r>
-          </a:p>
-        </p:txBody>
-      </p:sp>
-      <p:sp>
-        <p:nvSpPr>
-          <p:cNvPr id="8" name="Rectangle 7">
-            <a:extLst>
-              <a:ext uri="{FF2B5EF4-FFF2-40B4-BE49-F238E27FC236}">
-                <a16:creationId xmlns:a16="http://schemas.microsoft.com/office/drawing/2014/main" id="{B568C8C9-7016-4CFB-964B-82CFCE778F37}"/>
-              </a:ext>
-            </a:extLst>
-          </p:cNvPr>
-          <p:cNvSpPr>
-            <a:spLocks noGrp="1"/>
-          </p:cNvSpPr>
-          <p:nvPr/>
-        </p:nvSpPr>
-        <p:spPr>
-          <a:xfrm>
-            <a:off x="552450" y="6429375"/>
-            <a:ext cx="11087100" cy="47625"/>
-          </a:xfrm>
-          <a:prstGeom prst="rect">
-            <a:avLst/>
-          </a:prstGeom>
-          <a:solidFill>
-            <a:srgbClr val="F57C24"/>
-          </a:solidFill>
-          <a:ln w="0">
-            <a:noFill/>
-          </a:ln>
-        </p:spPr>
-        <p:txBody>
-          <a:bodyPr/>
-          <a:lstStyle/>
-          <a:p>
-            <a:endParaRPr lang="en-GB"/>
-          </a:p>
-        </p:txBody>
-      </p:sp>
-      <p:sp>
-        <p:nvSpPr>
-          <p:cNvPr id="9" name="Rectangle 8">
-            <a:extLst>
-              <a:ext uri="{FF2B5EF4-FFF2-40B4-BE49-F238E27FC236}">
-                <a16:creationId xmlns:a16="http://schemas.microsoft.com/office/drawing/2014/main" id="{04A4327D-6FC2-4A15-B6B1-B3E909314EB3}"/>
-              </a:ext>
-            </a:extLst>
-          </p:cNvPr>
-          <p:cNvSpPr>
-            <a:spLocks noGrp="1"/>
-          </p:cNvSpPr>
-          <p:nvPr/>
-        </p:nvSpPr>
-        <p:spPr>
-          <a:xfrm>
-            <a:off x="4286250" y="6429375"/>
-            <a:ext cx="7353300" cy="47625"/>
-          </a:xfrm>
-          <a:prstGeom prst="rect">
-            <a:avLst/>
-          </a:prstGeom>
-          <a:solidFill>
-            <a:srgbClr val="77A9D7"/>
-          </a:solidFill>
-          <a:ln w="0">
-            <a:noFill/>
-          </a:ln>
-        </p:spPr>
-        <p:txBody>
-          <a:bodyPr/>
-          <a:lstStyle/>
-          <a:p>
-            <a:endParaRPr lang="en-GB"/>
-          </a:p>
-        </p:txBody>
-      </p:sp>
-    </p:spTree>
-    <p:extLst>
-      <p:ext uri="{BB962C8B-B14F-4D97-AF65-F5344CB8AC3E}">
-        <p14:creationId xmlns:p14="http://schemas.microsoft.com/office/powerpoint/2010/main" val="1200177838"/>
       </p:ext>
     </p:extLst>
   </p:cSld>
